--- a/public/videos/repositories/fudousan-kakaku-watch/fudousan-kakaku-watch-tech-preview.pptx
+++ b/public/videos/repositories/fudousan-kakaku-watch/fudousan-kakaku-watch-tech-preview.pptx
@@ -134,7 +134,7 @@
           <p:cNvPr id="2" name="タイトル 1">
             <a:extLst>
               <a:ext uri="{FF2B5EF4-FFF2-40B4-BE49-F238E27FC236}">
-                <a16:creationId xmlns:a16="http://schemas.microsoft.com/office/drawing/2014/main" id="{E37F00DB-E669-0211-3E49-731450D160BD}"/>
+                <a16:creationId xmlns:a16="http://schemas.microsoft.com/office/drawing/2014/main" id="{20AA79CB-041A-F301-9AF9-79E417EA10B1}"/>
               </a:ext>
             </a:extLst>
           </p:cNvPr>
@@ -171,7 +171,7 @@
           <p:cNvPr id="3" name="字幕 2">
             <a:extLst>
               <a:ext uri="{FF2B5EF4-FFF2-40B4-BE49-F238E27FC236}">
-                <a16:creationId xmlns:a16="http://schemas.microsoft.com/office/drawing/2014/main" id="{6D59C534-4922-281E-B052-9EE72E163D16}"/>
+                <a16:creationId xmlns:a16="http://schemas.microsoft.com/office/drawing/2014/main" id="{901C92C3-35B5-D175-B614-1D155CBE2A19}"/>
               </a:ext>
             </a:extLst>
           </p:cNvPr>
@@ -241,7 +241,7 @@
           <p:cNvPr id="4" name="日付プレースホルダー 3">
             <a:extLst>
               <a:ext uri="{FF2B5EF4-FFF2-40B4-BE49-F238E27FC236}">
-                <a16:creationId xmlns:a16="http://schemas.microsoft.com/office/drawing/2014/main" id="{1FFF3AC4-13FF-F307-E9B4-714AC0DFFCAA}"/>
+                <a16:creationId xmlns:a16="http://schemas.microsoft.com/office/drawing/2014/main" id="{16D51E9D-3488-14F9-8A7F-113DEB4E52D7}"/>
               </a:ext>
             </a:extLst>
           </p:cNvPr>
@@ -257,7 +257,7 @@
           <a:bodyPr/>
           <a:lstStyle/>
           <a:p>
-            <a:fld id="{BF8A0E68-6F99-44AC-82FB-23DA67C1F890}" type="datetimeFigureOut">
+            <a:fld id="{BAD13085-5AAE-4EA5-8D53-37C2EB5D3A4C}" type="datetimeFigureOut">
               <a:rPr kumimoji="1" lang="ja-JP" altLang="en-US" smtClean="0"/>
               <a:t>2026/7/30</a:t>
             </a:fld>
@@ -270,7 +270,7 @@
           <p:cNvPr id="5" name="フッター プレースホルダー 4">
             <a:extLst>
               <a:ext uri="{FF2B5EF4-FFF2-40B4-BE49-F238E27FC236}">
-                <a16:creationId xmlns:a16="http://schemas.microsoft.com/office/drawing/2014/main" id="{A351F95E-C9AB-381C-5E30-5053CD526C55}"/>
+                <a16:creationId xmlns:a16="http://schemas.microsoft.com/office/drawing/2014/main" id="{4F24A017-4527-FC1E-0F47-835D55316F3D}"/>
               </a:ext>
             </a:extLst>
           </p:cNvPr>
@@ -295,7 +295,7 @@
           <p:cNvPr id="6" name="スライド番号プレースホルダー 5">
             <a:extLst>
               <a:ext uri="{FF2B5EF4-FFF2-40B4-BE49-F238E27FC236}">
-                <a16:creationId xmlns:a16="http://schemas.microsoft.com/office/drawing/2014/main" id="{65E30C5D-F63A-2AB4-F126-9878A693D24E}"/>
+                <a16:creationId xmlns:a16="http://schemas.microsoft.com/office/drawing/2014/main" id="{59B22DAD-5C27-F742-4AC6-D9D4F6553B74}"/>
               </a:ext>
             </a:extLst>
           </p:cNvPr>
@@ -311,7 +311,7 @@
           <a:bodyPr/>
           <a:lstStyle/>
           <a:p>
-            <a:fld id="{24452E01-145E-4159-B91E-C73BE673969F}" type="slidenum">
+            <a:fld id="{B255746F-3A8D-4EC9-A0B9-D22450B9F8B5}" type="slidenum">
               <a:rPr kumimoji="1" lang="ja-JP" altLang="en-US" smtClean="0"/>
               <a:t>‹#›</a:t>
             </a:fld>
@@ -322,7 +322,7 @@
     </p:spTree>
     <p:extLst>
       <p:ext uri="{BB962C8B-B14F-4D97-AF65-F5344CB8AC3E}">
-        <p14:creationId xmlns:p14="http://schemas.microsoft.com/office/powerpoint/2010/main" val="958943416"/>
+        <p14:creationId xmlns:p14="http://schemas.microsoft.com/office/powerpoint/2010/main" val="3664358016"/>
       </p:ext>
     </p:extLst>
   </p:cSld>
@@ -354,7 +354,7 @@
           <p:cNvPr id="2" name="タイトル 1">
             <a:extLst>
               <a:ext uri="{FF2B5EF4-FFF2-40B4-BE49-F238E27FC236}">
-                <a16:creationId xmlns:a16="http://schemas.microsoft.com/office/drawing/2014/main" id="{0B7C7DC3-37E2-EBF1-8A9D-00F0A17A84E1}"/>
+                <a16:creationId xmlns:a16="http://schemas.microsoft.com/office/drawing/2014/main" id="{F16BDC64-EB68-1BFC-B96E-78B668E05168}"/>
               </a:ext>
             </a:extLst>
           </p:cNvPr>
@@ -382,7 +382,7 @@
           <p:cNvPr id="3" name="縦書きテキスト プレースホルダー 2">
             <a:extLst>
               <a:ext uri="{FF2B5EF4-FFF2-40B4-BE49-F238E27FC236}">
-                <a16:creationId xmlns:a16="http://schemas.microsoft.com/office/drawing/2014/main" id="{F1C08968-6588-C85E-4553-20CA85191F3C}"/>
+                <a16:creationId xmlns:a16="http://schemas.microsoft.com/office/drawing/2014/main" id="{A5A56BFE-56D8-5DB2-8A2B-1AA3111C4D56}"/>
               </a:ext>
             </a:extLst>
           </p:cNvPr>
@@ -471,7 +471,7 @@
           <p:cNvPr id="4" name="日付プレースホルダー 3">
             <a:extLst>
               <a:ext uri="{FF2B5EF4-FFF2-40B4-BE49-F238E27FC236}">
-                <a16:creationId xmlns:a16="http://schemas.microsoft.com/office/drawing/2014/main" id="{81916B3D-8E1F-7A71-EEBF-3BBCB80D9258}"/>
+                <a16:creationId xmlns:a16="http://schemas.microsoft.com/office/drawing/2014/main" id="{A7B15EA4-3078-B145-6A93-A40332D1ACD8}"/>
               </a:ext>
             </a:extLst>
           </p:cNvPr>
@@ -487,7 +487,7 @@
           <a:bodyPr/>
           <a:lstStyle/>
           <a:p>
-            <a:fld id="{BF8A0E68-6F99-44AC-82FB-23DA67C1F890}" type="datetimeFigureOut">
+            <a:fld id="{BAD13085-5AAE-4EA5-8D53-37C2EB5D3A4C}" type="datetimeFigureOut">
               <a:rPr kumimoji="1" lang="ja-JP" altLang="en-US" smtClean="0"/>
               <a:t>2026/7/30</a:t>
             </a:fld>
@@ -500,7 +500,7 @@
           <p:cNvPr id="5" name="フッター プレースホルダー 4">
             <a:extLst>
               <a:ext uri="{FF2B5EF4-FFF2-40B4-BE49-F238E27FC236}">
-                <a16:creationId xmlns:a16="http://schemas.microsoft.com/office/drawing/2014/main" id="{C547FEB4-946E-6FE5-7FEF-8A9260D8C599}"/>
+                <a16:creationId xmlns:a16="http://schemas.microsoft.com/office/drawing/2014/main" id="{B39AA54E-9228-55A3-4B1F-5B04EEB6DCF5}"/>
               </a:ext>
             </a:extLst>
           </p:cNvPr>
@@ -525,7 +525,7 @@
           <p:cNvPr id="6" name="スライド番号プレースホルダー 5">
             <a:extLst>
               <a:ext uri="{FF2B5EF4-FFF2-40B4-BE49-F238E27FC236}">
-                <a16:creationId xmlns:a16="http://schemas.microsoft.com/office/drawing/2014/main" id="{C741E824-8B1D-404A-FC13-3A9851D34EF7}"/>
+                <a16:creationId xmlns:a16="http://schemas.microsoft.com/office/drawing/2014/main" id="{D1BA7078-070A-3136-5026-C71D28F9EEE4}"/>
               </a:ext>
             </a:extLst>
           </p:cNvPr>
@@ -541,7 +541,7 @@
           <a:bodyPr/>
           <a:lstStyle/>
           <a:p>
-            <a:fld id="{24452E01-145E-4159-B91E-C73BE673969F}" type="slidenum">
+            <a:fld id="{B255746F-3A8D-4EC9-A0B9-D22450B9F8B5}" type="slidenum">
               <a:rPr kumimoji="1" lang="ja-JP" altLang="en-US" smtClean="0"/>
               <a:t>‹#›</a:t>
             </a:fld>
@@ -552,7 +552,7 @@
     </p:spTree>
     <p:extLst>
       <p:ext uri="{BB962C8B-B14F-4D97-AF65-F5344CB8AC3E}">
-        <p14:creationId xmlns:p14="http://schemas.microsoft.com/office/powerpoint/2010/main" val="1275261729"/>
+        <p14:creationId xmlns:p14="http://schemas.microsoft.com/office/powerpoint/2010/main" val="2179160956"/>
       </p:ext>
     </p:extLst>
   </p:cSld>
@@ -584,7 +584,7 @@
           <p:cNvPr id="2" name="縦書きタイトル 1">
             <a:extLst>
               <a:ext uri="{FF2B5EF4-FFF2-40B4-BE49-F238E27FC236}">
-                <a16:creationId xmlns:a16="http://schemas.microsoft.com/office/drawing/2014/main" id="{9CA570B0-CF6B-C0A4-0C1F-67C69F4CA65A}"/>
+                <a16:creationId xmlns:a16="http://schemas.microsoft.com/office/drawing/2014/main" id="{17DEA87F-90DB-E8C6-D173-603F23FABD34}"/>
               </a:ext>
             </a:extLst>
           </p:cNvPr>
@@ -617,7 +617,7 @@
           <p:cNvPr id="3" name="縦書きテキスト プレースホルダー 2">
             <a:extLst>
               <a:ext uri="{FF2B5EF4-FFF2-40B4-BE49-F238E27FC236}">
-                <a16:creationId xmlns:a16="http://schemas.microsoft.com/office/drawing/2014/main" id="{E17E9121-500B-0E12-1CB5-0AB6F02236C8}"/>
+                <a16:creationId xmlns:a16="http://schemas.microsoft.com/office/drawing/2014/main" id="{BC551272-7AD2-12AA-9BC4-3D89C3282954}"/>
               </a:ext>
             </a:extLst>
           </p:cNvPr>
@@ -711,7 +711,7 @@
           <p:cNvPr id="4" name="日付プレースホルダー 3">
             <a:extLst>
               <a:ext uri="{FF2B5EF4-FFF2-40B4-BE49-F238E27FC236}">
-                <a16:creationId xmlns:a16="http://schemas.microsoft.com/office/drawing/2014/main" id="{219AAB41-4D75-6A1A-E7CD-A5DFB00701E2}"/>
+                <a16:creationId xmlns:a16="http://schemas.microsoft.com/office/drawing/2014/main" id="{DD4EE932-6968-74A3-9A98-EE9B66A43D36}"/>
               </a:ext>
             </a:extLst>
           </p:cNvPr>
@@ -727,7 +727,7 @@
           <a:bodyPr/>
           <a:lstStyle/>
           <a:p>
-            <a:fld id="{BF8A0E68-6F99-44AC-82FB-23DA67C1F890}" type="datetimeFigureOut">
+            <a:fld id="{BAD13085-5AAE-4EA5-8D53-37C2EB5D3A4C}" type="datetimeFigureOut">
               <a:rPr kumimoji="1" lang="ja-JP" altLang="en-US" smtClean="0"/>
               <a:t>2026/7/30</a:t>
             </a:fld>
@@ -740,7 +740,7 @@
           <p:cNvPr id="5" name="フッター プレースホルダー 4">
             <a:extLst>
               <a:ext uri="{FF2B5EF4-FFF2-40B4-BE49-F238E27FC236}">
-                <a16:creationId xmlns:a16="http://schemas.microsoft.com/office/drawing/2014/main" id="{06274D3F-2A8B-F82A-E483-CFBD4FBAF7E3}"/>
+                <a16:creationId xmlns:a16="http://schemas.microsoft.com/office/drawing/2014/main" id="{DE8500F4-E9FF-EE43-D4BB-8085615CA7A5}"/>
               </a:ext>
             </a:extLst>
           </p:cNvPr>
@@ -765,7 +765,7 @@
           <p:cNvPr id="6" name="スライド番号プレースホルダー 5">
             <a:extLst>
               <a:ext uri="{FF2B5EF4-FFF2-40B4-BE49-F238E27FC236}">
-                <a16:creationId xmlns:a16="http://schemas.microsoft.com/office/drawing/2014/main" id="{A5316F9B-37B7-5BED-B0F7-E935CACE50D4}"/>
+                <a16:creationId xmlns:a16="http://schemas.microsoft.com/office/drawing/2014/main" id="{A5EDE770-6012-D577-D3BC-02B0A9668C01}"/>
               </a:ext>
             </a:extLst>
           </p:cNvPr>
@@ -781,7 +781,7 @@
           <a:bodyPr/>
           <a:lstStyle/>
           <a:p>
-            <a:fld id="{24452E01-145E-4159-B91E-C73BE673969F}" type="slidenum">
+            <a:fld id="{B255746F-3A8D-4EC9-A0B9-D22450B9F8B5}" type="slidenum">
               <a:rPr kumimoji="1" lang="ja-JP" altLang="en-US" smtClean="0"/>
               <a:t>‹#›</a:t>
             </a:fld>
@@ -792,7 +792,7 @@
     </p:spTree>
     <p:extLst>
       <p:ext uri="{BB962C8B-B14F-4D97-AF65-F5344CB8AC3E}">
-        <p14:creationId xmlns:p14="http://schemas.microsoft.com/office/powerpoint/2010/main" val="387626744"/>
+        <p14:creationId xmlns:p14="http://schemas.microsoft.com/office/powerpoint/2010/main" val="2847040273"/>
       </p:ext>
     </p:extLst>
   </p:cSld>
@@ -824,7 +824,7 @@
           <p:cNvPr id="2" name="タイトル 1">
             <a:extLst>
               <a:ext uri="{FF2B5EF4-FFF2-40B4-BE49-F238E27FC236}">
-                <a16:creationId xmlns:a16="http://schemas.microsoft.com/office/drawing/2014/main" id="{C9A16BB5-C0FD-CA76-9FD3-F26E30F2AD53}"/>
+                <a16:creationId xmlns:a16="http://schemas.microsoft.com/office/drawing/2014/main" id="{5B8FAB4B-5F7D-DF5B-72F6-65E874F6BC07}"/>
               </a:ext>
             </a:extLst>
           </p:cNvPr>
@@ -852,7 +852,7 @@
           <p:cNvPr id="3" name="コンテンツ プレースホルダー 2">
             <a:extLst>
               <a:ext uri="{FF2B5EF4-FFF2-40B4-BE49-F238E27FC236}">
-                <a16:creationId xmlns:a16="http://schemas.microsoft.com/office/drawing/2014/main" id="{6C8D0E25-6249-C5C6-8C99-7853B7E9C42E}"/>
+                <a16:creationId xmlns:a16="http://schemas.microsoft.com/office/drawing/2014/main" id="{D8F29787-7CDD-228B-CB1C-62EC7B6304A8}"/>
               </a:ext>
             </a:extLst>
           </p:cNvPr>
@@ -941,7 +941,7 @@
           <p:cNvPr id="4" name="日付プレースホルダー 3">
             <a:extLst>
               <a:ext uri="{FF2B5EF4-FFF2-40B4-BE49-F238E27FC236}">
-                <a16:creationId xmlns:a16="http://schemas.microsoft.com/office/drawing/2014/main" id="{9FA7A823-A803-BBD1-C3A9-855593D3E8D3}"/>
+                <a16:creationId xmlns:a16="http://schemas.microsoft.com/office/drawing/2014/main" id="{DA2EE959-015C-3765-CA52-54A9829DF9B3}"/>
               </a:ext>
             </a:extLst>
           </p:cNvPr>
@@ -957,7 +957,7 @@
           <a:bodyPr/>
           <a:lstStyle/>
           <a:p>
-            <a:fld id="{BF8A0E68-6F99-44AC-82FB-23DA67C1F890}" type="datetimeFigureOut">
+            <a:fld id="{BAD13085-5AAE-4EA5-8D53-37C2EB5D3A4C}" type="datetimeFigureOut">
               <a:rPr kumimoji="1" lang="ja-JP" altLang="en-US" smtClean="0"/>
               <a:t>2026/7/30</a:t>
             </a:fld>
@@ -970,7 +970,7 @@
           <p:cNvPr id="5" name="フッター プレースホルダー 4">
             <a:extLst>
               <a:ext uri="{FF2B5EF4-FFF2-40B4-BE49-F238E27FC236}">
-                <a16:creationId xmlns:a16="http://schemas.microsoft.com/office/drawing/2014/main" id="{33EED130-E0AF-2511-7A3E-22CB743E58DC}"/>
+                <a16:creationId xmlns:a16="http://schemas.microsoft.com/office/drawing/2014/main" id="{DBBF0A45-408C-D456-35FF-FD1D9C436734}"/>
               </a:ext>
             </a:extLst>
           </p:cNvPr>
@@ -995,7 +995,7 @@
           <p:cNvPr id="6" name="スライド番号プレースホルダー 5">
             <a:extLst>
               <a:ext uri="{FF2B5EF4-FFF2-40B4-BE49-F238E27FC236}">
-                <a16:creationId xmlns:a16="http://schemas.microsoft.com/office/drawing/2014/main" id="{76EE52BA-12D7-F2AF-C381-780B9FAA2359}"/>
+                <a16:creationId xmlns:a16="http://schemas.microsoft.com/office/drawing/2014/main" id="{B270F934-898E-7F19-FCCB-43644CCD3813}"/>
               </a:ext>
             </a:extLst>
           </p:cNvPr>
@@ -1011,7 +1011,7 @@
           <a:bodyPr/>
           <a:lstStyle/>
           <a:p>
-            <a:fld id="{24452E01-145E-4159-B91E-C73BE673969F}" type="slidenum">
+            <a:fld id="{B255746F-3A8D-4EC9-A0B9-D22450B9F8B5}" type="slidenum">
               <a:rPr kumimoji="1" lang="ja-JP" altLang="en-US" smtClean="0"/>
               <a:t>‹#›</a:t>
             </a:fld>
@@ -1022,7 +1022,7 @@
     </p:spTree>
     <p:extLst>
       <p:ext uri="{BB962C8B-B14F-4D97-AF65-F5344CB8AC3E}">
-        <p14:creationId xmlns:p14="http://schemas.microsoft.com/office/powerpoint/2010/main" val="1376912033"/>
+        <p14:creationId xmlns:p14="http://schemas.microsoft.com/office/powerpoint/2010/main" val="993426511"/>
       </p:ext>
     </p:extLst>
   </p:cSld>
@@ -1054,7 +1054,7 @@
           <p:cNvPr id="2" name="タイトル 1">
             <a:extLst>
               <a:ext uri="{FF2B5EF4-FFF2-40B4-BE49-F238E27FC236}">
-                <a16:creationId xmlns:a16="http://schemas.microsoft.com/office/drawing/2014/main" id="{4C6B93D0-327D-F32A-3D22-20A74D6E1BC8}"/>
+                <a16:creationId xmlns:a16="http://schemas.microsoft.com/office/drawing/2014/main" id="{F107B36A-7903-C21F-3DF2-15AE8A510384}"/>
               </a:ext>
             </a:extLst>
           </p:cNvPr>
@@ -1091,7 +1091,7 @@
           <p:cNvPr id="3" name="テキスト プレースホルダー 2">
             <a:extLst>
               <a:ext uri="{FF2B5EF4-FFF2-40B4-BE49-F238E27FC236}">
-                <a16:creationId xmlns:a16="http://schemas.microsoft.com/office/drawing/2014/main" id="{A3A01F6F-1E81-A16D-E371-60DF31E32617}"/>
+                <a16:creationId xmlns:a16="http://schemas.microsoft.com/office/drawing/2014/main" id="{63E096A0-8581-B51C-4FCD-6ED6A6CD182A}"/>
               </a:ext>
             </a:extLst>
           </p:cNvPr>
@@ -1216,7 +1216,7 @@
           <p:cNvPr id="4" name="日付プレースホルダー 3">
             <a:extLst>
               <a:ext uri="{FF2B5EF4-FFF2-40B4-BE49-F238E27FC236}">
-                <a16:creationId xmlns:a16="http://schemas.microsoft.com/office/drawing/2014/main" id="{06B50515-ED1B-7146-D0DB-2D2100925177}"/>
+                <a16:creationId xmlns:a16="http://schemas.microsoft.com/office/drawing/2014/main" id="{11DCDEDE-EC01-A338-0890-22509D9282DA}"/>
               </a:ext>
             </a:extLst>
           </p:cNvPr>
@@ -1232,7 +1232,7 @@
           <a:bodyPr/>
           <a:lstStyle/>
           <a:p>
-            <a:fld id="{BF8A0E68-6F99-44AC-82FB-23DA67C1F890}" type="datetimeFigureOut">
+            <a:fld id="{BAD13085-5AAE-4EA5-8D53-37C2EB5D3A4C}" type="datetimeFigureOut">
               <a:rPr kumimoji="1" lang="ja-JP" altLang="en-US" smtClean="0"/>
               <a:t>2026/7/30</a:t>
             </a:fld>
@@ -1245,7 +1245,7 @@
           <p:cNvPr id="5" name="フッター プレースホルダー 4">
             <a:extLst>
               <a:ext uri="{FF2B5EF4-FFF2-40B4-BE49-F238E27FC236}">
-                <a16:creationId xmlns:a16="http://schemas.microsoft.com/office/drawing/2014/main" id="{8FB65D1D-C46F-E344-3DD1-3A0D0D35CBBD}"/>
+                <a16:creationId xmlns:a16="http://schemas.microsoft.com/office/drawing/2014/main" id="{12D0E947-1CF4-3516-0DE4-10B5C4AAAB90}"/>
               </a:ext>
             </a:extLst>
           </p:cNvPr>
@@ -1270,7 +1270,7 @@
           <p:cNvPr id="6" name="スライド番号プレースホルダー 5">
             <a:extLst>
               <a:ext uri="{FF2B5EF4-FFF2-40B4-BE49-F238E27FC236}">
-                <a16:creationId xmlns:a16="http://schemas.microsoft.com/office/drawing/2014/main" id="{68BE9947-8655-3864-E5FA-4EDDEB184CEE}"/>
+                <a16:creationId xmlns:a16="http://schemas.microsoft.com/office/drawing/2014/main" id="{2D51AF19-86B7-EFC6-3456-3B56AAF5B25E}"/>
               </a:ext>
             </a:extLst>
           </p:cNvPr>
@@ -1286,7 +1286,7 @@
           <a:bodyPr/>
           <a:lstStyle/>
           <a:p>
-            <a:fld id="{24452E01-145E-4159-B91E-C73BE673969F}" type="slidenum">
+            <a:fld id="{B255746F-3A8D-4EC9-A0B9-D22450B9F8B5}" type="slidenum">
               <a:rPr kumimoji="1" lang="ja-JP" altLang="en-US" smtClean="0"/>
               <a:t>‹#›</a:t>
             </a:fld>
@@ -1297,7 +1297,7 @@
     </p:spTree>
     <p:extLst>
       <p:ext uri="{BB962C8B-B14F-4D97-AF65-F5344CB8AC3E}">
-        <p14:creationId xmlns:p14="http://schemas.microsoft.com/office/powerpoint/2010/main" val="2768482253"/>
+        <p14:creationId xmlns:p14="http://schemas.microsoft.com/office/powerpoint/2010/main" val="4040745010"/>
       </p:ext>
     </p:extLst>
   </p:cSld>
@@ -1329,7 +1329,7 @@
           <p:cNvPr id="2" name="タイトル 1">
             <a:extLst>
               <a:ext uri="{FF2B5EF4-FFF2-40B4-BE49-F238E27FC236}">
-                <a16:creationId xmlns:a16="http://schemas.microsoft.com/office/drawing/2014/main" id="{871A8664-5E5C-3DCD-9BA5-D17F6970EF94}"/>
+                <a16:creationId xmlns:a16="http://schemas.microsoft.com/office/drawing/2014/main" id="{89D67A8C-F9CB-350B-E4E2-76EAD2FDF02E}"/>
               </a:ext>
             </a:extLst>
           </p:cNvPr>
@@ -1357,7 +1357,7 @@
           <p:cNvPr id="3" name="コンテンツ プレースホルダー 2">
             <a:extLst>
               <a:ext uri="{FF2B5EF4-FFF2-40B4-BE49-F238E27FC236}">
-                <a16:creationId xmlns:a16="http://schemas.microsoft.com/office/drawing/2014/main" id="{CB7ADC43-F138-1085-5482-574B8663FBDD}"/>
+                <a16:creationId xmlns:a16="http://schemas.microsoft.com/office/drawing/2014/main" id="{031B6997-6791-C3CF-23B5-2050F7560A77}"/>
               </a:ext>
             </a:extLst>
           </p:cNvPr>
@@ -1451,7 +1451,7 @@
           <p:cNvPr id="4" name="コンテンツ プレースホルダー 3">
             <a:extLst>
               <a:ext uri="{FF2B5EF4-FFF2-40B4-BE49-F238E27FC236}">
-                <a16:creationId xmlns:a16="http://schemas.microsoft.com/office/drawing/2014/main" id="{7FB76395-9867-A1A1-16CA-A1284BD38F12}"/>
+                <a16:creationId xmlns:a16="http://schemas.microsoft.com/office/drawing/2014/main" id="{BA87AD54-E24A-B927-1C3C-0B555756D21A}"/>
               </a:ext>
             </a:extLst>
           </p:cNvPr>
@@ -1545,7 +1545,7 @@
           <p:cNvPr id="5" name="日付プレースホルダー 4">
             <a:extLst>
               <a:ext uri="{FF2B5EF4-FFF2-40B4-BE49-F238E27FC236}">
-                <a16:creationId xmlns:a16="http://schemas.microsoft.com/office/drawing/2014/main" id="{1F72C127-3CD9-BF88-9614-04C588184FEC}"/>
+                <a16:creationId xmlns:a16="http://schemas.microsoft.com/office/drawing/2014/main" id="{8539A915-44DE-1FEB-F2A3-C5B2E2C3BF5D}"/>
               </a:ext>
             </a:extLst>
           </p:cNvPr>
@@ -1561,7 +1561,7 @@
           <a:bodyPr/>
           <a:lstStyle/>
           <a:p>
-            <a:fld id="{BF8A0E68-6F99-44AC-82FB-23DA67C1F890}" type="datetimeFigureOut">
+            <a:fld id="{BAD13085-5AAE-4EA5-8D53-37C2EB5D3A4C}" type="datetimeFigureOut">
               <a:rPr kumimoji="1" lang="ja-JP" altLang="en-US" smtClean="0"/>
               <a:t>2026/7/30</a:t>
             </a:fld>
@@ -1574,7 +1574,7 @@
           <p:cNvPr id="6" name="フッター プレースホルダー 5">
             <a:extLst>
               <a:ext uri="{FF2B5EF4-FFF2-40B4-BE49-F238E27FC236}">
-                <a16:creationId xmlns:a16="http://schemas.microsoft.com/office/drawing/2014/main" id="{1EED2343-1D5A-AC83-B721-522DC47DB90A}"/>
+                <a16:creationId xmlns:a16="http://schemas.microsoft.com/office/drawing/2014/main" id="{C088AECB-A270-08F3-11D6-ED9BA641B59D}"/>
               </a:ext>
             </a:extLst>
           </p:cNvPr>
@@ -1599,7 +1599,7 @@
           <p:cNvPr id="7" name="スライド番号プレースホルダー 6">
             <a:extLst>
               <a:ext uri="{FF2B5EF4-FFF2-40B4-BE49-F238E27FC236}">
-                <a16:creationId xmlns:a16="http://schemas.microsoft.com/office/drawing/2014/main" id="{ACEDDA53-E2CA-1B9C-EB97-D0DF094B9665}"/>
+                <a16:creationId xmlns:a16="http://schemas.microsoft.com/office/drawing/2014/main" id="{04522618-93AC-9412-B6D0-EAE68A23D402}"/>
               </a:ext>
             </a:extLst>
           </p:cNvPr>
@@ -1615,7 +1615,7 @@
           <a:bodyPr/>
           <a:lstStyle/>
           <a:p>
-            <a:fld id="{24452E01-145E-4159-B91E-C73BE673969F}" type="slidenum">
+            <a:fld id="{B255746F-3A8D-4EC9-A0B9-D22450B9F8B5}" type="slidenum">
               <a:rPr kumimoji="1" lang="ja-JP" altLang="en-US" smtClean="0"/>
               <a:t>‹#›</a:t>
             </a:fld>
@@ -1626,7 +1626,7 @@
     </p:spTree>
     <p:extLst>
       <p:ext uri="{BB962C8B-B14F-4D97-AF65-F5344CB8AC3E}">
-        <p14:creationId xmlns:p14="http://schemas.microsoft.com/office/powerpoint/2010/main" val="1763291495"/>
+        <p14:creationId xmlns:p14="http://schemas.microsoft.com/office/powerpoint/2010/main" val="686707358"/>
       </p:ext>
     </p:extLst>
   </p:cSld>
@@ -1658,7 +1658,7 @@
           <p:cNvPr id="2" name="タイトル 1">
             <a:extLst>
               <a:ext uri="{FF2B5EF4-FFF2-40B4-BE49-F238E27FC236}">
-                <a16:creationId xmlns:a16="http://schemas.microsoft.com/office/drawing/2014/main" id="{32C8746E-7078-8098-4DB7-0179CF2781F0}"/>
+                <a16:creationId xmlns:a16="http://schemas.microsoft.com/office/drawing/2014/main" id="{E6102FC8-3A8A-1116-772E-1D6C50769522}"/>
               </a:ext>
             </a:extLst>
           </p:cNvPr>
@@ -1691,7 +1691,7 @@
           <p:cNvPr id="3" name="テキスト プレースホルダー 2">
             <a:extLst>
               <a:ext uri="{FF2B5EF4-FFF2-40B4-BE49-F238E27FC236}">
-                <a16:creationId xmlns:a16="http://schemas.microsoft.com/office/drawing/2014/main" id="{BC236C5E-4E18-D500-C626-BC1D17F8AE8A}"/>
+                <a16:creationId xmlns:a16="http://schemas.microsoft.com/office/drawing/2014/main" id="{D9F15EF1-FD59-A59F-196F-CF54ACD91C95}"/>
               </a:ext>
             </a:extLst>
           </p:cNvPr>
@@ -1762,7 +1762,7 @@
           <p:cNvPr id="4" name="コンテンツ プレースホルダー 3">
             <a:extLst>
               <a:ext uri="{FF2B5EF4-FFF2-40B4-BE49-F238E27FC236}">
-                <a16:creationId xmlns:a16="http://schemas.microsoft.com/office/drawing/2014/main" id="{E9ECF98D-B944-A7E2-8053-1215169F3D6E}"/>
+                <a16:creationId xmlns:a16="http://schemas.microsoft.com/office/drawing/2014/main" id="{DBB6B697-50EF-35C2-7B59-DF406EF09461}"/>
               </a:ext>
             </a:extLst>
           </p:cNvPr>
@@ -1856,7 +1856,7 @@
           <p:cNvPr id="5" name="テキスト プレースホルダー 4">
             <a:extLst>
               <a:ext uri="{FF2B5EF4-FFF2-40B4-BE49-F238E27FC236}">
-                <a16:creationId xmlns:a16="http://schemas.microsoft.com/office/drawing/2014/main" id="{CDBF0D4B-81F3-6EF0-2607-E671C4CD7276}"/>
+                <a16:creationId xmlns:a16="http://schemas.microsoft.com/office/drawing/2014/main" id="{614CE4C7-0E2A-3FA5-02BB-1D489811D9A5}"/>
               </a:ext>
             </a:extLst>
           </p:cNvPr>
@@ -1927,7 +1927,7 @@
           <p:cNvPr id="6" name="コンテンツ プレースホルダー 5">
             <a:extLst>
               <a:ext uri="{FF2B5EF4-FFF2-40B4-BE49-F238E27FC236}">
-                <a16:creationId xmlns:a16="http://schemas.microsoft.com/office/drawing/2014/main" id="{1EF4B35D-ACAF-9FA4-8E56-8B6F9ECDCD87}"/>
+                <a16:creationId xmlns:a16="http://schemas.microsoft.com/office/drawing/2014/main" id="{C1B1296D-D98A-EF3E-C2F4-5C1AAABFE94D}"/>
               </a:ext>
             </a:extLst>
           </p:cNvPr>
@@ -2021,7 +2021,7 @@
           <p:cNvPr id="7" name="日付プレースホルダー 6">
             <a:extLst>
               <a:ext uri="{FF2B5EF4-FFF2-40B4-BE49-F238E27FC236}">
-                <a16:creationId xmlns:a16="http://schemas.microsoft.com/office/drawing/2014/main" id="{F3751F9B-2AEA-1045-A299-2C09DF74AEE2}"/>
+                <a16:creationId xmlns:a16="http://schemas.microsoft.com/office/drawing/2014/main" id="{3DE79D8B-4659-6E7B-EE68-8FFA6C2EA46A}"/>
               </a:ext>
             </a:extLst>
           </p:cNvPr>
@@ -2037,7 +2037,7 @@
           <a:bodyPr/>
           <a:lstStyle/>
           <a:p>
-            <a:fld id="{BF8A0E68-6F99-44AC-82FB-23DA67C1F890}" type="datetimeFigureOut">
+            <a:fld id="{BAD13085-5AAE-4EA5-8D53-37C2EB5D3A4C}" type="datetimeFigureOut">
               <a:rPr kumimoji="1" lang="ja-JP" altLang="en-US" smtClean="0"/>
               <a:t>2026/7/30</a:t>
             </a:fld>
@@ -2050,7 +2050,7 @@
           <p:cNvPr id="8" name="フッター プレースホルダー 7">
             <a:extLst>
               <a:ext uri="{FF2B5EF4-FFF2-40B4-BE49-F238E27FC236}">
-                <a16:creationId xmlns:a16="http://schemas.microsoft.com/office/drawing/2014/main" id="{0868F0AA-7255-444E-79C1-3A142F07ED7C}"/>
+                <a16:creationId xmlns:a16="http://schemas.microsoft.com/office/drawing/2014/main" id="{C91F075F-063C-1ABB-8D1D-03A03626C654}"/>
               </a:ext>
             </a:extLst>
           </p:cNvPr>
@@ -2075,7 +2075,7 @@
           <p:cNvPr id="9" name="スライド番号プレースホルダー 8">
             <a:extLst>
               <a:ext uri="{FF2B5EF4-FFF2-40B4-BE49-F238E27FC236}">
-                <a16:creationId xmlns:a16="http://schemas.microsoft.com/office/drawing/2014/main" id="{6017B27A-6680-ACA9-1EAC-3E960669688D}"/>
+                <a16:creationId xmlns:a16="http://schemas.microsoft.com/office/drawing/2014/main" id="{A4B50954-6E7E-8E4B-E755-DC7035606850}"/>
               </a:ext>
             </a:extLst>
           </p:cNvPr>
@@ -2091,7 +2091,7 @@
           <a:bodyPr/>
           <a:lstStyle/>
           <a:p>
-            <a:fld id="{24452E01-145E-4159-B91E-C73BE673969F}" type="slidenum">
+            <a:fld id="{B255746F-3A8D-4EC9-A0B9-D22450B9F8B5}" type="slidenum">
               <a:rPr kumimoji="1" lang="ja-JP" altLang="en-US" smtClean="0"/>
               <a:t>‹#›</a:t>
             </a:fld>
@@ -2102,7 +2102,7 @@
     </p:spTree>
     <p:extLst>
       <p:ext uri="{BB962C8B-B14F-4D97-AF65-F5344CB8AC3E}">
-        <p14:creationId xmlns:p14="http://schemas.microsoft.com/office/powerpoint/2010/main" val="1689342692"/>
+        <p14:creationId xmlns:p14="http://schemas.microsoft.com/office/powerpoint/2010/main" val="1676265199"/>
       </p:ext>
     </p:extLst>
   </p:cSld>
@@ -2134,7 +2134,7 @@
           <p:cNvPr id="2" name="タイトル 1">
             <a:extLst>
               <a:ext uri="{FF2B5EF4-FFF2-40B4-BE49-F238E27FC236}">
-                <a16:creationId xmlns:a16="http://schemas.microsoft.com/office/drawing/2014/main" id="{0922289E-926E-8B4F-DC0B-4B7903E0CF92}"/>
+                <a16:creationId xmlns:a16="http://schemas.microsoft.com/office/drawing/2014/main" id="{D0D3142D-CF07-945B-20C2-B28D2E5B22BF}"/>
               </a:ext>
             </a:extLst>
           </p:cNvPr>
@@ -2162,7 +2162,7 @@
           <p:cNvPr id="3" name="日付プレースホルダー 2">
             <a:extLst>
               <a:ext uri="{FF2B5EF4-FFF2-40B4-BE49-F238E27FC236}">
-                <a16:creationId xmlns:a16="http://schemas.microsoft.com/office/drawing/2014/main" id="{955D75A5-A3AE-A89B-D52D-F9C888CABCCD}"/>
+                <a16:creationId xmlns:a16="http://schemas.microsoft.com/office/drawing/2014/main" id="{5CE88EF5-14CB-B955-6793-EA06C5C22AA7}"/>
               </a:ext>
             </a:extLst>
           </p:cNvPr>
@@ -2178,7 +2178,7 @@
           <a:bodyPr/>
           <a:lstStyle/>
           <a:p>
-            <a:fld id="{BF8A0E68-6F99-44AC-82FB-23DA67C1F890}" type="datetimeFigureOut">
+            <a:fld id="{BAD13085-5AAE-4EA5-8D53-37C2EB5D3A4C}" type="datetimeFigureOut">
               <a:rPr kumimoji="1" lang="ja-JP" altLang="en-US" smtClean="0"/>
               <a:t>2026/7/30</a:t>
             </a:fld>
@@ -2191,7 +2191,7 @@
           <p:cNvPr id="4" name="フッター プレースホルダー 3">
             <a:extLst>
               <a:ext uri="{FF2B5EF4-FFF2-40B4-BE49-F238E27FC236}">
-                <a16:creationId xmlns:a16="http://schemas.microsoft.com/office/drawing/2014/main" id="{447DA876-0E5A-DC91-C860-0A55528A11AE}"/>
+                <a16:creationId xmlns:a16="http://schemas.microsoft.com/office/drawing/2014/main" id="{A1ADD99E-C6C6-2C1D-8EDB-5A102D00BA18}"/>
               </a:ext>
             </a:extLst>
           </p:cNvPr>
@@ -2216,7 +2216,7 @@
           <p:cNvPr id="5" name="スライド番号プレースホルダー 4">
             <a:extLst>
               <a:ext uri="{FF2B5EF4-FFF2-40B4-BE49-F238E27FC236}">
-                <a16:creationId xmlns:a16="http://schemas.microsoft.com/office/drawing/2014/main" id="{1A096793-02EE-B72D-83F8-CDEEB788F28E}"/>
+                <a16:creationId xmlns:a16="http://schemas.microsoft.com/office/drawing/2014/main" id="{936CA8E0-36AD-8986-84A0-05A84C6810B6}"/>
               </a:ext>
             </a:extLst>
           </p:cNvPr>
@@ -2232,7 +2232,7 @@
           <a:bodyPr/>
           <a:lstStyle/>
           <a:p>
-            <a:fld id="{24452E01-145E-4159-B91E-C73BE673969F}" type="slidenum">
+            <a:fld id="{B255746F-3A8D-4EC9-A0B9-D22450B9F8B5}" type="slidenum">
               <a:rPr kumimoji="1" lang="ja-JP" altLang="en-US" smtClean="0"/>
               <a:t>‹#›</a:t>
             </a:fld>
@@ -2243,7 +2243,7 @@
     </p:spTree>
     <p:extLst>
       <p:ext uri="{BB962C8B-B14F-4D97-AF65-F5344CB8AC3E}">
-        <p14:creationId xmlns:p14="http://schemas.microsoft.com/office/powerpoint/2010/main" val="961670952"/>
+        <p14:creationId xmlns:p14="http://schemas.microsoft.com/office/powerpoint/2010/main" val="1387416894"/>
       </p:ext>
     </p:extLst>
   </p:cSld>
@@ -2275,7 +2275,7 @@
           <p:cNvPr id="2" name="日付プレースホルダー 1">
             <a:extLst>
               <a:ext uri="{FF2B5EF4-FFF2-40B4-BE49-F238E27FC236}">
-                <a16:creationId xmlns:a16="http://schemas.microsoft.com/office/drawing/2014/main" id="{15A81D75-8C51-72D6-F161-0C4B16FC960C}"/>
+                <a16:creationId xmlns:a16="http://schemas.microsoft.com/office/drawing/2014/main" id="{17CB6B14-5286-AE6B-38A4-AF01837C7A46}"/>
               </a:ext>
             </a:extLst>
           </p:cNvPr>
@@ -2291,7 +2291,7 @@
           <a:bodyPr/>
           <a:lstStyle/>
           <a:p>
-            <a:fld id="{BF8A0E68-6F99-44AC-82FB-23DA67C1F890}" type="datetimeFigureOut">
+            <a:fld id="{BAD13085-5AAE-4EA5-8D53-37C2EB5D3A4C}" type="datetimeFigureOut">
               <a:rPr kumimoji="1" lang="ja-JP" altLang="en-US" smtClean="0"/>
               <a:t>2026/7/30</a:t>
             </a:fld>
@@ -2304,7 +2304,7 @@
           <p:cNvPr id="3" name="フッター プレースホルダー 2">
             <a:extLst>
               <a:ext uri="{FF2B5EF4-FFF2-40B4-BE49-F238E27FC236}">
-                <a16:creationId xmlns:a16="http://schemas.microsoft.com/office/drawing/2014/main" id="{D2B5EDAD-BB8B-E8CB-2F66-08A5D6F7613B}"/>
+                <a16:creationId xmlns:a16="http://schemas.microsoft.com/office/drawing/2014/main" id="{FD9F9F74-1FB1-E602-B33B-9C69CC75FBE7}"/>
               </a:ext>
             </a:extLst>
           </p:cNvPr>
@@ -2329,7 +2329,7 @@
           <p:cNvPr id="4" name="スライド番号プレースホルダー 3">
             <a:extLst>
               <a:ext uri="{FF2B5EF4-FFF2-40B4-BE49-F238E27FC236}">
-                <a16:creationId xmlns:a16="http://schemas.microsoft.com/office/drawing/2014/main" id="{ACB824E0-33F9-8437-F530-4E3C775AE820}"/>
+                <a16:creationId xmlns:a16="http://schemas.microsoft.com/office/drawing/2014/main" id="{D041BF59-19A2-541F-F0A9-E96424AA7778}"/>
               </a:ext>
             </a:extLst>
           </p:cNvPr>
@@ -2345,7 +2345,7 @@
           <a:bodyPr/>
           <a:lstStyle/>
           <a:p>
-            <a:fld id="{24452E01-145E-4159-B91E-C73BE673969F}" type="slidenum">
+            <a:fld id="{B255746F-3A8D-4EC9-A0B9-D22450B9F8B5}" type="slidenum">
               <a:rPr kumimoji="1" lang="ja-JP" altLang="en-US" smtClean="0"/>
               <a:t>‹#›</a:t>
             </a:fld>
@@ -2356,7 +2356,7 @@
     </p:spTree>
     <p:extLst>
       <p:ext uri="{BB962C8B-B14F-4D97-AF65-F5344CB8AC3E}">
-        <p14:creationId xmlns:p14="http://schemas.microsoft.com/office/powerpoint/2010/main" val="1639481851"/>
+        <p14:creationId xmlns:p14="http://schemas.microsoft.com/office/powerpoint/2010/main" val="1504891398"/>
       </p:ext>
     </p:extLst>
   </p:cSld>
@@ -2388,7 +2388,7 @@
           <p:cNvPr id="2" name="タイトル 1">
             <a:extLst>
               <a:ext uri="{FF2B5EF4-FFF2-40B4-BE49-F238E27FC236}">
-                <a16:creationId xmlns:a16="http://schemas.microsoft.com/office/drawing/2014/main" id="{FBA3F700-43BB-8461-EA39-7C6D211F99F6}"/>
+                <a16:creationId xmlns:a16="http://schemas.microsoft.com/office/drawing/2014/main" id="{EFF18CF9-8DF8-2589-6464-9E8BA3DB162E}"/>
               </a:ext>
             </a:extLst>
           </p:cNvPr>
@@ -2425,7 +2425,7 @@
           <p:cNvPr id="3" name="コンテンツ プレースホルダー 2">
             <a:extLst>
               <a:ext uri="{FF2B5EF4-FFF2-40B4-BE49-F238E27FC236}">
-                <a16:creationId xmlns:a16="http://schemas.microsoft.com/office/drawing/2014/main" id="{BFB69D3A-5FA5-ECC4-88C1-E9E754EA8E95}"/>
+                <a16:creationId xmlns:a16="http://schemas.microsoft.com/office/drawing/2014/main" id="{C794EF38-F783-5C6F-3427-B0E932E03738}"/>
               </a:ext>
             </a:extLst>
           </p:cNvPr>
@@ -2547,7 +2547,7 @@
           <p:cNvPr id="4" name="テキスト プレースホルダー 3">
             <a:extLst>
               <a:ext uri="{FF2B5EF4-FFF2-40B4-BE49-F238E27FC236}">
-                <a16:creationId xmlns:a16="http://schemas.microsoft.com/office/drawing/2014/main" id="{EEA19834-5C98-CA4D-BB7F-AC54084FA8A6}"/>
+                <a16:creationId xmlns:a16="http://schemas.microsoft.com/office/drawing/2014/main" id="{1068FC93-6FE8-082D-7EF7-D594AED3ABE1}"/>
               </a:ext>
             </a:extLst>
           </p:cNvPr>
@@ -2618,7 +2618,7 @@
           <p:cNvPr id="5" name="日付プレースホルダー 4">
             <a:extLst>
               <a:ext uri="{FF2B5EF4-FFF2-40B4-BE49-F238E27FC236}">
-                <a16:creationId xmlns:a16="http://schemas.microsoft.com/office/drawing/2014/main" id="{8364BAC6-F56A-D0C6-1532-B8BFCF066FCB}"/>
+                <a16:creationId xmlns:a16="http://schemas.microsoft.com/office/drawing/2014/main" id="{9B6382AF-0452-746E-E908-F242068E9EB6}"/>
               </a:ext>
             </a:extLst>
           </p:cNvPr>
@@ -2634,7 +2634,7 @@
           <a:bodyPr/>
           <a:lstStyle/>
           <a:p>
-            <a:fld id="{BF8A0E68-6F99-44AC-82FB-23DA67C1F890}" type="datetimeFigureOut">
+            <a:fld id="{BAD13085-5AAE-4EA5-8D53-37C2EB5D3A4C}" type="datetimeFigureOut">
               <a:rPr kumimoji="1" lang="ja-JP" altLang="en-US" smtClean="0"/>
               <a:t>2026/7/30</a:t>
             </a:fld>
@@ -2647,7 +2647,7 @@
           <p:cNvPr id="6" name="フッター プレースホルダー 5">
             <a:extLst>
               <a:ext uri="{FF2B5EF4-FFF2-40B4-BE49-F238E27FC236}">
-                <a16:creationId xmlns:a16="http://schemas.microsoft.com/office/drawing/2014/main" id="{011E243E-0EA5-B4DF-835C-941F309AF5C3}"/>
+                <a16:creationId xmlns:a16="http://schemas.microsoft.com/office/drawing/2014/main" id="{43C0BC45-1743-9B8B-EFCF-DBFF0D81CF04}"/>
               </a:ext>
             </a:extLst>
           </p:cNvPr>
@@ -2672,7 +2672,7 @@
           <p:cNvPr id="7" name="スライド番号プレースホルダー 6">
             <a:extLst>
               <a:ext uri="{FF2B5EF4-FFF2-40B4-BE49-F238E27FC236}">
-                <a16:creationId xmlns:a16="http://schemas.microsoft.com/office/drawing/2014/main" id="{C93B683D-833A-A33B-8E28-CFD848744B70}"/>
+                <a16:creationId xmlns:a16="http://schemas.microsoft.com/office/drawing/2014/main" id="{D151AAC1-FF6D-683B-664C-53EB68441ADB}"/>
               </a:ext>
             </a:extLst>
           </p:cNvPr>
@@ -2688,7 +2688,7 @@
           <a:bodyPr/>
           <a:lstStyle/>
           <a:p>
-            <a:fld id="{24452E01-145E-4159-B91E-C73BE673969F}" type="slidenum">
+            <a:fld id="{B255746F-3A8D-4EC9-A0B9-D22450B9F8B5}" type="slidenum">
               <a:rPr kumimoji="1" lang="ja-JP" altLang="en-US" smtClean="0"/>
               <a:t>‹#›</a:t>
             </a:fld>
@@ -2699,7 +2699,7 @@
     </p:spTree>
     <p:extLst>
       <p:ext uri="{BB962C8B-B14F-4D97-AF65-F5344CB8AC3E}">
-        <p14:creationId xmlns:p14="http://schemas.microsoft.com/office/powerpoint/2010/main" val="4194568981"/>
+        <p14:creationId xmlns:p14="http://schemas.microsoft.com/office/powerpoint/2010/main" val="4272129668"/>
       </p:ext>
     </p:extLst>
   </p:cSld>
@@ -2731,7 +2731,7 @@
           <p:cNvPr id="2" name="タイトル 1">
             <a:extLst>
               <a:ext uri="{FF2B5EF4-FFF2-40B4-BE49-F238E27FC236}">
-                <a16:creationId xmlns:a16="http://schemas.microsoft.com/office/drawing/2014/main" id="{9AD30028-3E76-3E7B-61D4-8D874399970B}"/>
+                <a16:creationId xmlns:a16="http://schemas.microsoft.com/office/drawing/2014/main" id="{AE504828-62EF-544A-E432-1358E25299B4}"/>
               </a:ext>
             </a:extLst>
           </p:cNvPr>
@@ -2768,7 +2768,7 @@
           <p:cNvPr id="3" name="図プレースホルダー 2">
             <a:extLst>
               <a:ext uri="{FF2B5EF4-FFF2-40B4-BE49-F238E27FC236}">
-                <a16:creationId xmlns:a16="http://schemas.microsoft.com/office/drawing/2014/main" id="{CB8E515B-D620-2846-35C5-291B8303AB6B}"/>
+                <a16:creationId xmlns:a16="http://schemas.microsoft.com/office/drawing/2014/main" id="{57844972-0D01-347E-E57E-29D672575961}"/>
               </a:ext>
             </a:extLst>
           </p:cNvPr>
@@ -2835,7 +2835,7 @@
           <p:cNvPr id="4" name="テキスト プレースホルダー 3">
             <a:extLst>
               <a:ext uri="{FF2B5EF4-FFF2-40B4-BE49-F238E27FC236}">
-                <a16:creationId xmlns:a16="http://schemas.microsoft.com/office/drawing/2014/main" id="{1B2C229C-0515-56EF-E2B2-FE6E82C84A7F}"/>
+                <a16:creationId xmlns:a16="http://schemas.microsoft.com/office/drawing/2014/main" id="{8195E475-A47B-C045-5CD2-50A14A20BC56}"/>
               </a:ext>
             </a:extLst>
           </p:cNvPr>
@@ -2906,7 +2906,7 @@
           <p:cNvPr id="5" name="日付プレースホルダー 4">
             <a:extLst>
               <a:ext uri="{FF2B5EF4-FFF2-40B4-BE49-F238E27FC236}">
-                <a16:creationId xmlns:a16="http://schemas.microsoft.com/office/drawing/2014/main" id="{4704522B-DF97-98AB-3A33-D303362821E3}"/>
+                <a16:creationId xmlns:a16="http://schemas.microsoft.com/office/drawing/2014/main" id="{F21ADF90-06FE-C185-265D-F3FE218117E4}"/>
               </a:ext>
             </a:extLst>
           </p:cNvPr>
@@ -2922,7 +2922,7 @@
           <a:bodyPr/>
           <a:lstStyle/>
           <a:p>
-            <a:fld id="{BF8A0E68-6F99-44AC-82FB-23DA67C1F890}" type="datetimeFigureOut">
+            <a:fld id="{BAD13085-5AAE-4EA5-8D53-37C2EB5D3A4C}" type="datetimeFigureOut">
               <a:rPr kumimoji="1" lang="ja-JP" altLang="en-US" smtClean="0"/>
               <a:t>2026/7/30</a:t>
             </a:fld>
@@ -2935,7 +2935,7 @@
           <p:cNvPr id="6" name="フッター プレースホルダー 5">
             <a:extLst>
               <a:ext uri="{FF2B5EF4-FFF2-40B4-BE49-F238E27FC236}">
-                <a16:creationId xmlns:a16="http://schemas.microsoft.com/office/drawing/2014/main" id="{C4E87BE9-A829-A8AB-83B3-B7D818FDE198}"/>
+                <a16:creationId xmlns:a16="http://schemas.microsoft.com/office/drawing/2014/main" id="{C6E7E68D-4048-5FC2-E63D-C34C4700E462}"/>
               </a:ext>
             </a:extLst>
           </p:cNvPr>
@@ -2960,7 +2960,7 @@
           <p:cNvPr id="7" name="スライド番号プレースホルダー 6">
             <a:extLst>
               <a:ext uri="{FF2B5EF4-FFF2-40B4-BE49-F238E27FC236}">
-                <a16:creationId xmlns:a16="http://schemas.microsoft.com/office/drawing/2014/main" id="{CDE1F072-790F-2327-6734-AB43365100E0}"/>
+                <a16:creationId xmlns:a16="http://schemas.microsoft.com/office/drawing/2014/main" id="{186DF770-4B7D-5002-5583-3BB27F26CDDE}"/>
               </a:ext>
             </a:extLst>
           </p:cNvPr>
@@ -2976,7 +2976,7 @@
           <a:bodyPr/>
           <a:lstStyle/>
           <a:p>
-            <a:fld id="{24452E01-145E-4159-B91E-C73BE673969F}" type="slidenum">
+            <a:fld id="{B255746F-3A8D-4EC9-A0B9-D22450B9F8B5}" type="slidenum">
               <a:rPr kumimoji="1" lang="ja-JP" altLang="en-US" smtClean="0"/>
               <a:t>‹#›</a:t>
             </a:fld>
@@ -2987,7 +2987,7 @@
     </p:spTree>
     <p:extLst>
       <p:ext uri="{BB962C8B-B14F-4D97-AF65-F5344CB8AC3E}">
-        <p14:creationId xmlns:p14="http://schemas.microsoft.com/office/powerpoint/2010/main" val="1788879975"/>
+        <p14:creationId xmlns:p14="http://schemas.microsoft.com/office/powerpoint/2010/main" val="580347177"/>
       </p:ext>
     </p:extLst>
   </p:cSld>
@@ -3024,7 +3024,7 @@
           <p:cNvPr id="2" name="タイトル プレースホルダー 1">
             <a:extLst>
               <a:ext uri="{FF2B5EF4-FFF2-40B4-BE49-F238E27FC236}">
-                <a16:creationId xmlns:a16="http://schemas.microsoft.com/office/drawing/2014/main" id="{7D2A51D5-D2D4-065E-2E9D-EFED48D9DF22}"/>
+                <a16:creationId xmlns:a16="http://schemas.microsoft.com/office/drawing/2014/main" id="{4A8DBAFE-8B86-E9ED-5707-162081CCCA8C}"/>
               </a:ext>
             </a:extLst>
           </p:cNvPr>
@@ -3062,7 +3062,7 @@
           <p:cNvPr id="3" name="テキスト プレースホルダー 2">
             <a:extLst>
               <a:ext uri="{FF2B5EF4-FFF2-40B4-BE49-F238E27FC236}">
-                <a16:creationId xmlns:a16="http://schemas.microsoft.com/office/drawing/2014/main" id="{F6F3B2A6-E144-6B7E-A15D-F0BABEC91AA8}"/>
+                <a16:creationId xmlns:a16="http://schemas.microsoft.com/office/drawing/2014/main" id="{C30B2037-E2DC-D2D8-4AB1-AF1D04B2FC04}"/>
               </a:ext>
             </a:extLst>
           </p:cNvPr>
@@ -3161,7 +3161,7 @@
           <p:cNvPr id="4" name="日付プレースホルダー 3">
             <a:extLst>
               <a:ext uri="{FF2B5EF4-FFF2-40B4-BE49-F238E27FC236}">
-                <a16:creationId xmlns:a16="http://schemas.microsoft.com/office/drawing/2014/main" id="{A419DF97-BF1B-87E0-82E1-E1BBE6DF4AB4}"/>
+                <a16:creationId xmlns:a16="http://schemas.microsoft.com/office/drawing/2014/main" id="{ADCE9373-8082-0360-CC16-944FABF1650C}"/>
               </a:ext>
             </a:extLst>
           </p:cNvPr>
@@ -3195,7 +3195,7 @@
             </a:lvl1pPr>
           </a:lstStyle>
           <a:p>
-            <a:fld id="{BF8A0E68-6F99-44AC-82FB-23DA67C1F890}" type="datetimeFigureOut">
+            <a:fld id="{BAD13085-5AAE-4EA5-8D53-37C2EB5D3A4C}" type="datetimeFigureOut">
               <a:rPr kumimoji="1" lang="ja-JP" altLang="en-US" smtClean="0"/>
               <a:t>2026/7/30</a:t>
             </a:fld>
@@ -3208,7 +3208,7 @@
           <p:cNvPr id="5" name="フッター プレースホルダー 4">
             <a:extLst>
               <a:ext uri="{FF2B5EF4-FFF2-40B4-BE49-F238E27FC236}">
-                <a16:creationId xmlns:a16="http://schemas.microsoft.com/office/drawing/2014/main" id="{EE4B366C-FEA2-8350-15E5-FEA7C0F42B02}"/>
+                <a16:creationId xmlns:a16="http://schemas.microsoft.com/office/drawing/2014/main" id="{CA976A3A-6693-B6A2-2BC5-5C1C318A8CEB}"/>
               </a:ext>
             </a:extLst>
           </p:cNvPr>
@@ -3251,7 +3251,7 @@
           <p:cNvPr id="6" name="スライド番号プレースホルダー 5">
             <a:extLst>
               <a:ext uri="{FF2B5EF4-FFF2-40B4-BE49-F238E27FC236}">
-                <a16:creationId xmlns:a16="http://schemas.microsoft.com/office/drawing/2014/main" id="{04A4A8DA-A93D-11C7-99EE-59B0CAC3B97A}"/>
+                <a16:creationId xmlns:a16="http://schemas.microsoft.com/office/drawing/2014/main" id="{A769B7B2-4DBA-BAE9-E143-76764201471E}"/>
               </a:ext>
             </a:extLst>
           </p:cNvPr>
@@ -3285,7 +3285,7 @@
             </a:lvl1pPr>
           </a:lstStyle>
           <a:p>
-            <a:fld id="{24452E01-145E-4159-B91E-C73BE673969F}" type="slidenum">
+            <a:fld id="{B255746F-3A8D-4EC9-A0B9-D22450B9F8B5}" type="slidenum">
               <a:rPr kumimoji="1" lang="ja-JP" altLang="en-US" smtClean="0"/>
               <a:t>‹#›</a:t>
             </a:fld>
@@ -3296,7 +3296,7 @@
     </p:spTree>
     <p:extLst>
       <p:ext uri="{BB962C8B-B14F-4D97-AF65-F5344CB8AC3E}">
-        <p14:creationId xmlns:p14="http://schemas.microsoft.com/office/powerpoint/2010/main" val="1438250815"/>
+        <p14:creationId xmlns:p14="http://schemas.microsoft.com/office/powerpoint/2010/main" val="595747954"/>
       </p:ext>
     </p:extLst>
   </p:cSld>
@@ -3619,7 +3619,7 @@
           <p:cNvPr id="2" name="テキスト ボックス 1">
             <a:extLst>
               <a:ext uri="{FF2B5EF4-FFF2-40B4-BE49-F238E27FC236}">
-                <a16:creationId xmlns:a16="http://schemas.microsoft.com/office/drawing/2014/main" id="{CA344EA3-3590-96E8-0D6B-B08264540236}"/>
+                <a16:creationId xmlns:a16="http://schemas.microsoft.com/office/drawing/2014/main" id="{C5FB5D0A-3466-1EBB-0718-17DE0454CA4C}"/>
               </a:ext>
             </a:extLst>
           </p:cNvPr>
@@ -3665,7 +3665,7 @@
           <p:cNvPr id="3" name="テキスト ボックス 2">
             <a:extLst>
               <a:ext uri="{FF2B5EF4-FFF2-40B4-BE49-F238E27FC236}">
-                <a16:creationId xmlns:a16="http://schemas.microsoft.com/office/drawing/2014/main" id="{DE35DF04-AF2D-D6C2-0CC6-7A0103430127}"/>
+                <a16:creationId xmlns:a16="http://schemas.microsoft.com/office/drawing/2014/main" id="{BE214DC6-2989-89A3-FAA7-E63060C9C418}"/>
               </a:ext>
             </a:extLst>
           </p:cNvPr>
@@ -3714,7 +3714,7 @@
           <p:cNvPr id="4" name="テキスト ボックス 3">
             <a:extLst>
               <a:ext uri="{FF2B5EF4-FFF2-40B4-BE49-F238E27FC236}">
-                <a16:creationId xmlns:a16="http://schemas.microsoft.com/office/drawing/2014/main" id="{3364A174-6193-4AB3-8325-AB0E124ED712}"/>
+                <a16:creationId xmlns:a16="http://schemas.microsoft.com/office/drawing/2014/main" id="{CAFC45D1-241E-8F99-7A17-514999CA95B4}"/>
               </a:ext>
             </a:extLst>
           </p:cNvPr>
@@ -3754,7 +3754,7 @@
           <p:cNvPr id="5" name="テキスト ボックス 4">
             <a:extLst>
               <a:ext uri="{FF2B5EF4-FFF2-40B4-BE49-F238E27FC236}">
-                <a16:creationId xmlns:a16="http://schemas.microsoft.com/office/drawing/2014/main" id="{BB2FB7AA-1B1A-E6DA-EAF5-FEA2D0A053BC}"/>
+                <a16:creationId xmlns:a16="http://schemas.microsoft.com/office/drawing/2014/main" id="{54985EAC-720D-4291-2F6E-4A3274973638}"/>
               </a:ext>
             </a:extLst>
           </p:cNvPr>
@@ -3801,7 +3801,7 @@
             <a:hlinkClick r:id="" action="ppaction://media"/>
             <a:extLst>
               <a:ext uri="{FF2B5EF4-FFF2-40B4-BE49-F238E27FC236}">
-                <a16:creationId xmlns:a16="http://schemas.microsoft.com/office/drawing/2014/main" id="{0C469D4E-B193-EA19-8F18-648C57CD21A7}"/>
+                <a16:creationId xmlns:a16="http://schemas.microsoft.com/office/drawing/2014/main" id="{8C70A684-99DA-1741-A556-F7486AAE2FD8}"/>
               </a:ext>
             </a:extLst>
           </p:cNvPr>
@@ -3836,7 +3836,7 @@
     </p:spTree>
     <p:extLst>
       <p:ext uri="{BB962C8B-B14F-4D97-AF65-F5344CB8AC3E}">
-        <p14:creationId xmlns:p14="http://schemas.microsoft.com/office/powerpoint/2010/main" val="1080230006"/>
+        <p14:creationId xmlns:p14="http://schemas.microsoft.com/office/powerpoint/2010/main" val="2914758861"/>
       </p:ext>
     </p:extLst>
   </p:cSld>
@@ -3960,7 +3960,7 @@
           <p:cNvPr id="2" name="テキスト ボックス 1">
             <a:extLst>
               <a:ext uri="{FF2B5EF4-FFF2-40B4-BE49-F238E27FC236}">
-                <a16:creationId xmlns:a16="http://schemas.microsoft.com/office/drawing/2014/main" id="{4F4147C3-A61F-0C42-062C-93DE053EDF9E}"/>
+                <a16:creationId xmlns:a16="http://schemas.microsoft.com/office/drawing/2014/main" id="{DDA8B17D-0D4A-6B7F-3362-1A1FB35D985E}"/>
               </a:ext>
             </a:extLst>
           </p:cNvPr>
@@ -4006,7 +4006,7 @@
           <p:cNvPr id="3" name="テキスト ボックス 2">
             <a:extLst>
               <a:ext uri="{FF2B5EF4-FFF2-40B4-BE49-F238E27FC236}">
-                <a16:creationId xmlns:a16="http://schemas.microsoft.com/office/drawing/2014/main" id="{1C843078-280D-3D5F-AD4C-2CDEE1FD8BA2}"/>
+                <a16:creationId xmlns:a16="http://schemas.microsoft.com/office/drawing/2014/main" id="{097CDC4C-9117-61C6-94D7-74D77459C9F8}"/>
               </a:ext>
             </a:extLst>
           </p:cNvPr>
@@ -4046,7 +4046,7 @@
           <p:cNvPr id="4" name="テキスト ボックス 3">
             <a:extLst>
               <a:ext uri="{FF2B5EF4-FFF2-40B4-BE49-F238E27FC236}">
-                <a16:creationId xmlns:a16="http://schemas.microsoft.com/office/drawing/2014/main" id="{9C7112EE-4D61-9D47-7226-8A738D7F4380}"/>
+                <a16:creationId xmlns:a16="http://schemas.microsoft.com/office/drawing/2014/main" id="{BBA81140-ED89-34EF-266B-A2C55F4EE686}"/>
               </a:ext>
             </a:extLst>
           </p:cNvPr>
@@ -4076,14 +4076,17 @@
                 </a:solidFill>
                 <a:latin typeface="Arial" panose="020B0604020202020204" pitchFamily="34" charset="0"/>
               </a:rPr>
-              <a:t>About Laravel Laravel is a web application framework with expressive, elegant syntax</a:t>
-            </a:r>
-            <a:endParaRPr kumimoji="1" lang="ja-JP" altLang="en-US" sz="2000">
-              <a:solidFill>
-                <a:srgbClr val="333333"/>
-              </a:solidFill>
-              <a:latin typeface="Arial" panose="020B0604020202020204" pitchFamily="34" charset="0"/>
-            </a:endParaRPr>
+              <a:t>Fudousan Kakaku Watch</a:t>
+            </a:r>
+            <a:r>
+              <a:rPr kumimoji="1" lang="ja-JP" altLang="en-US" sz="2000">
+                <a:solidFill>
+                  <a:srgbClr val="333333"/>
+                </a:solidFill>
+                <a:latin typeface="Arial" panose="020B0604020202020204" pitchFamily="34" charset="0"/>
+              </a:rPr>
+              <a:t>の目的、構成、実装を公開コードから確認できるプロジェクトです。</a:t>
+            </a:r>
           </a:p>
         </p:txBody>
       </p:sp>
@@ -4092,7 +4095,7 @@
           <p:cNvPr id="5" name="テキスト ボックス 4">
             <a:extLst>
               <a:ext uri="{FF2B5EF4-FFF2-40B4-BE49-F238E27FC236}">
-                <a16:creationId xmlns:a16="http://schemas.microsoft.com/office/drawing/2014/main" id="{65927074-0FD4-C3DC-393E-08E0D61CFFD9}"/>
+                <a16:creationId xmlns:a16="http://schemas.microsoft.com/office/drawing/2014/main" id="{0275FF38-3EAA-94B1-7965-4428841983BF}"/>
               </a:ext>
             </a:extLst>
           </p:cNvPr>
@@ -4139,7 +4142,7 @@
             <a:hlinkClick r:id="" action="ppaction://media"/>
             <a:extLst>
               <a:ext uri="{FF2B5EF4-FFF2-40B4-BE49-F238E27FC236}">
-                <a16:creationId xmlns:a16="http://schemas.microsoft.com/office/drawing/2014/main" id="{63CEF33D-6846-305D-583C-424C2896396F}"/>
+                <a16:creationId xmlns:a16="http://schemas.microsoft.com/office/drawing/2014/main" id="{5530013D-1F80-6A2A-7837-1C5F58CC90A2}"/>
               </a:ext>
             </a:extLst>
           </p:cNvPr>
@@ -4174,7 +4177,7 @@
     </p:spTree>
     <p:extLst>
       <p:ext uri="{BB962C8B-B14F-4D97-AF65-F5344CB8AC3E}">
-        <p14:creationId xmlns:p14="http://schemas.microsoft.com/office/powerpoint/2010/main" val="3085071880"/>
+        <p14:creationId xmlns:p14="http://schemas.microsoft.com/office/powerpoint/2010/main" val="31081688"/>
       </p:ext>
     </p:extLst>
   </p:cSld>
@@ -4183,10 +4186,10 @@
   </p:clrMapOvr>
   <mc:AlternateContent xmlns:mc="http://schemas.openxmlformats.org/markup-compatibility/2006">
     <mc:Choice xmlns:p14="http://schemas.microsoft.com/office/powerpoint/2010/main" Requires="p14">
-      <p:transition spd="slow" p14:dur="2000" advTm="8000"/>
+      <p:transition spd="slow" p14:dur="2000" advTm="9000"/>
     </mc:Choice>
     <mc:Fallback>
-      <p:transition spd="slow" advTm="8000"/>
+      <p:transition spd="slow" advTm="9000"/>
     </mc:Fallback>
   </mc:AlternateContent>
   <p:timing>
@@ -4217,7 +4220,7 @@
                                   <p:childTnLst>
                                     <p:cmd type="call" cmd="playFrom(0.0)">
                                       <p:cBhvr>
-                                        <p:cTn id="6" dur="7780" fill="hold"/>
+                                        <p:cTn id="6" dur="8511" fill="hold"/>
                                         <p:tgtEl>
                                           <p:spTgt spid="6"/>
                                         </p:tgtEl>
@@ -4298,7 +4301,7 @@
           <p:cNvPr id="2" name="テキスト ボックス 1">
             <a:extLst>
               <a:ext uri="{FF2B5EF4-FFF2-40B4-BE49-F238E27FC236}">
-                <a16:creationId xmlns:a16="http://schemas.microsoft.com/office/drawing/2014/main" id="{13E5010A-BE4E-21A9-5C6A-003FF54E7269}"/>
+                <a16:creationId xmlns:a16="http://schemas.microsoft.com/office/drawing/2014/main" id="{8AD16C76-1226-918E-41F9-66623FF2ADC6}"/>
               </a:ext>
             </a:extLst>
           </p:cNvPr>
@@ -4344,7 +4347,7 @@
           <p:cNvPr id="3" name="テキスト ボックス 2">
             <a:extLst>
               <a:ext uri="{FF2B5EF4-FFF2-40B4-BE49-F238E27FC236}">
-                <a16:creationId xmlns:a16="http://schemas.microsoft.com/office/drawing/2014/main" id="{6852B660-CBF1-6D2F-CC2B-B5BA5DF9D1B5}"/>
+                <a16:creationId xmlns:a16="http://schemas.microsoft.com/office/drawing/2014/main" id="{A8C336FE-978C-AEFC-8157-BF098E590DA7}"/>
               </a:ext>
             </a:extLst>
           </p:cNvPr>
@@ -4384,7 +4387,7 @@
           <p:cNvPr id="4" name="テキスト ボックス 3">
             <a:extLst>
               <a:ext uri="{FF2B5EF4-FFF2-40B4-BE49-F238E27FC236}">
-                <a16:creationId xmlns:a16="http://schemas.microsoft.com/office/drawing/2014/main" id="{221C2F4E-1C8D-A996-FB60-C352BA3E5D7B}"/>
+                <a16:creationId xmlns:a16="http://schemas.microsoft.com/office/drawing/2014/main" id="{40292A43-3A63-65F9-B6E8-338045925F70}"/>
               </a:ext>
             </a:extLst>
           </p:cNvPr>
@@ -4497,7 +4500,7 @@
           <p:cNvPr id="5" name="テキスト ボックス 4">
             <a:extLst>
               <a:ext uri="{FF2B5EF4-FFF2-40B4-BE49-F238E27FC236}">
-                <a16:creationId xmlns:a16="http://schemas.microsoft.com/office/drawing/2014/main" id="{8EFB40AC-3776-499A-E3BB-7917AEAB03AA}"/>
+                <a16:creationId xmlns:a16="http://schemas.microsoft.com/office/drawing/2014/main" id="{5B00E464-6836-7C4F-074E-81FBE1541538}"/>
               </a:ext>
             </a:extLst>
           </p:cNvPr>
@@ -4544,7 +4547,7 @@
             <a:hlinkClick r:id="" action="ppaction://media"/>
             <a:extLst>
               <a:ext uri="{FF2B5EF4-FFF2-40B4-BE49-F238E27FC236}">
-                <a16:creationId xmlns:a16="http://schemas.microsoft.com/office/drawing/2014/main" id="{FEE0E609-EAFA-F7D2-79C0-C2D17708CF7B}"/>
+                <a16:creationId xmlns:a16="http://schemas.microsoft.com/office/drawing/2014/main" id="{024B3136-6C47-49B0-E3F1-4A0CE1283B5E}"/>
               </a:ext>
             </a:extLst>
           </p:cNvPr>
@@ -4579,7 +4582,7 @@
     </p:spTree>
     <p:extLst>
       <p:ext uri="{BB962C8B-B14F-4D97-AF65-F5344CB8AC3E}">
-        <p14:creationId xmlns:p14="http://schemas.microsoft.com/office/powerpoint/2010/main" val="3508118100"/>
+        <p14:creationId xmlns:p14="http://schemas.microsoft.com/office/powerpoint/2010/main" val="2248050072"/>
       </p:ext>
     </p:extLst>
   </p:cSld>
@@ -4703,7 +4706,7 @@
           <p:cNvPr id="2" name="テキスト ボックス 1">
             <a:extLst>
               <a:ext uri="{FF2B5EF4-FFF2-40B4-BE49-F238E27FC236}">
-                <a16:creationId xmlns:a16="http://schemas.microsoft.com/office/drawing/2014/main" id="{6245186C-B6D7-756E-40E2-8571BD0D6A5F}"/>
+                <a16:creationId xmlns:a16="http://schemas.microsoft.com/office/drawing/2014/main" id="{A91B75E7-A43B-758E-7BE4-DA51711D9638}"/>
               </a:ext>
             </a:extLst>
           </p:cNvPr>
@@ -4749,7 +4752,7 @@
           <p:cNvPr id="3" name="テキスト ボックス 2">
             <a:extLst>
               <a:ext uri="{FF2B5EF4-FFF2-40B4-BE49-F238E27FC236}">
-                <a16:creationId xmlns:a16="http://schemas.microsoft.com/office/drawing/2014/main" id="{97FDFB7F-0797-CBE2-3E74-7BCC8E6155EB}"/>
+                <a16:creationId xmlns:a16="http://schemas.microsoft.com/office/drawing/2014/main" id="{F15CBE21-6A19-7174-2498-B28304211AB0}"/>
               </a:ext>
             </a:extLst>
           </p:cNvPr>
@@ -4789,7 +4792,7 @@
           <p:cNvPr id="4" name="テキスト ボックス 3">
             <a:extLst>
               <a:ext uri="{FF2B5EF4-FFF2-40B4-BE49-F238E27FC236}">
-                <a16:creationId xmlns:a16="http://schemas.microsoft.com/office/drawing/2014/main" id="{21AF0F4E-63A6-2361-198E-65E7FE50CAAD}"/>
+                <a16:creationId xmlns:a16="http://schemas.microsoft.com/office/drawing/2014/main" id="{172846A8-83A1-8553-2B08-DA670EB258FD}"/>
               </a:ext>
             </a:extLst>
           </p:cNvPr>
@@ -4899,7 +4902,7 @@
           <p:cNvPr id="5" name="テキスト ボックス 4">
             <a:extLst>
               <a:ext uri="{FF2B5EF4-FFF2-40B4-BE49-F238E27FC236}">
-                <a16:creationId xmlns:a16="http://schemas.microsoft.com/office/drawing/2014/main" id="{90E23C49-F57F-E0C3-73E6-F587F991CC9C}"/>
+                <a16:creationId xmlns:a16="http://schemas.microsoft.com/office/drawing/2014/main" id="{E7F8CC72-0F1F-4275-DA91-E01F69829DBF}"/>
               </a:ext>
             </a:extLst>
           </p:cNvPr>
@@ -4946,7 +4949,7 @@
             <a:hlinkClick r:id="" action="ppaction://media"/>
             <a:extLst>
               <a:ext uri="{FF2B5EF4-FFF2-40B4-BE49-F238E27FC236}">
-                <a16:creationId xmlns:a16="http://schemas.microsoft.com/office/drawing/2014/main" id="{556F05C8-3CFC-33B2-6E70-5FECA5B190C2}"/>
+                <a16:creationId xmlns:a16="http://schemas.microsoft.com/office/drawing/2014/main" id="{E55D769F-59AE-BA03-8214-1C42810BE613}"/>
               </a:ext>
             </a:extLst>
           </p:cNvPr>
@@ -4981,7 +4984,7 @@
     </p:spTree>
     <p:extLst>
       <p:ext uri="{BB962C8B-B14F-4D97-AF65-F5344CB8AC3E}">
-        <p14:creationId xmlns:p14="http://schemas.microsoft.com/office/powerpoint/2010/main" val="3243360353"/>
+        <p14:creationId xmlns:p14="http://schemas.microsoft.com/office/powerpoint/2010/main" val="3441660655"/>
       </p:ext>
     </p:extLst>
   </p:cSld>
@@ -5105,7 +5108,7 @@
           <p:cNvPr id="2" name="テキスト ボックス 1">
             <a:extLst>
               <a:ext uri="{FF2B5EF4-FFF2-40B4-BE49-F238E27FC236}">
-                <a16:creationId xmlns:a16="http://schemas.microsoft.com/office/drawing/2014/main" id="{427932D2-36E9-22FE-DC24-1D1306EC237C}"/>
+                <a16:creationId xmlns:a16="http://schemas.microsoft.com/office/drawing/2014/main" id="{6513FF12-FE7F-0326-3978-2057F9248980}"/>
               </a:ext>
             </a:extLst>
           </p:cNvPr>
@@ -5151,7 +5154,7 @@
           <p:cNvPr id="3" name="テキスト ボックス 2">
             <a:extLst>
               <a:ext uri="{FF2B5EF4-FFF2-40B4-BE49-F238E27FC236}">
-                <a16:creationId xmlns:a16="http://schemas.microsoft.com/office/drawing/2014/main" id="{AF1F613E-5611-CB62-99D6-7D9AE90007D9}"/>
+                <a16:creationId xmlns:a16="http://schemas.microsoft.com/office/drawing/2014/main" id="{1B366F4A-08DC-311E-365C-26473DD46F34}"/>
               </a:ext>
             </a:extLst>
           </p:cNvPr>
@@ -5191,7 +5194,7 @@
           <p:cNvPr id="4" name="テキスト ボックス 3">
             <a:extLst>
               <a:ext uri="{FF2B5EF4-FFF2-40B4-BE49-F238E27FC236}">
-                <a16:creationId xmlns:a16="http://schemas.microsoft.com/office/drawing/2014/main" id="{DAAF208B-6830-DC57-F342-8A72C5C5FA91}"/>
+                <a16:creationId xmlns:a16="http://schemas.microsoft.com/office/drawing/2014/main" id="{6EA28EE9-EEDE-E39E-2355-CBCA013B2B88}"/>
               </a:ext>
             </a:extLst>
           </p:cNvPr>
@@ -5215,58 +5218,13 @@
           <a:lstStyle/>
           <a:p>
             <a:r>
-              <a:rPr kumimoji="1" lang="en-US" altLang="ja-JP" sz="2000">
-                <a:solidFill>
-                  <a:srgbClr val="333333"/>
-                </a:solidFill>
-                <a:latin typeface="Arial" panose="020B0604020202020204" pitchFamily="34" charset="0"/>
-              </a:rPr>
-              <a:t>CheckRentWatches: </a:t>
-            </a:r>
-            <a:r>
               <a:rPr kumimoji="1" lang="ja-JP" altLang="en-US" sz="2000">
                 <a:solidFill>
                   <a:srgbClr val="333333"/>
                 </a:solidFill>
                 <a:latin typeface="Arial" panose="020B0604020202020204" pitchFamily="34" charset="0"/>
               </a:rPr>
-              <a:t>検知カーソルを</a:t>
-            </a:r>
-            <a:r>
-              <a:rPr kumimoji="1" lang="en-US" altLang="ja-JP" sz="2000">
-                <a:solidFill>
-                  <a:srgbClr val="333333"/>
-                </a:solidFill>
-                <a:latin typeface="Arial" panose="020B0604020202020204" pitchFamily="34" charset="0"/>
-              </a:rPr>
-              <a:t>created_at</a:t>
-            </a:r>
-            <a:r>
-              <a:rPr kumimoji="1" lang="ja-JP" altLang="en-US" sz="2000">
-                <a:solidFill>
-                  <a:srgbClr val="333333"/>
-                </a:solidFill>
-                <a:latin typeface="Arial" panose="020B0604020202020204" pitchFamily="34" charset="0"/>
-              </a:rPr>
-              <a:t>から</a:t>
-            </a:r>
-            <a:r>
-              <a:rPr kumimoji="1" lang="en-US" altLang="ja-JP" sz="2000">
-                <a:solidFill>
-                  <a:srgbClr val="333333"/>
-                </a:solidFill>
-                <a:latin typeface="Arial" panose="020B0604020202020204" pitchFamily="34" charset="0"/>
-              </a:rPr>
-              <a:t>rent_reports.id</a:t>
-            </a:r>
-            <a:r>
-              <a:rPr kumimoji="1" lang="ja-JP" altLang="en-US" sz="2000">
-                <a:solidFill>
-                  <a:srgbClr val="333333"/>
-                </a:solidFill>
-                <a:latin typeface="Arial" panose="020B0604020202020204" pitchFamily="34" charset="0"/>
-              </a:rPr>
-              <a:t>ベースに変更</a:t>
+              <a:t>直近のコミットでは、新機能の追加と実装強化が行われました。</a:t>
             </a:r>
           </a:p>
         </p:txBody>
@@ -5276,7 +5234,7 @@
           <p:cNvPr id="5" name="テキスト ボックス 4">
             <a:extLst>
               <a:ext uri="{FF2B5EF4-FFF2-40B4-BE49-F238E27FC236}">
-                <a16:creationId xmlns:a16="http://schemas.microsoft.com/office/drawing/2014/main" id="{B86478C3-5E6D-B481-DE16-918619965936}"/>
+                <a16:creationId xmlns:a16="http://schemas.microsoft.com/office/drawing/2014/main" id="{FD47C398-E30C-39F7-242D-737FD42D1707}"/>
               </a:ext>
             </a:extLst>
           </p:cNvPr>
@@ -5323,7 +5281,7 @@
             <a:hlinkClick r:id="" action="ppaction://media"/>
             <a:extLst>
               <a:ext uri="{FF2B5EF4-FFF2-40B4-BE49-F238E27FC236}">
-                <a16:creationId xmlns:a16="http://schemas.microsoft.com/office/drawing/2014/main" id="{A3034953-3FA2-F1E4-4B87-23682D212EEE}"/>
+                <a16:creationId xmlns:a16="http://schemas.microsoft.com/office/drawing/2014/main" id="{393FC0CC-DEFD-898A-CEA0-579D4B4C3E1A}"/>
               </a:ext>
             </a:extLst>
           </p:cNvPr>
@@ -5358,7 +5316,7 @@
     </p:spTree>
     <p:extLst>
       <p:ext uri="{BB962C8B-B14F-4D97-AF65-F5344CB8AC3E}">
-        <p14:creationId xmlns:p14="http://schemas.microsoft.com/office/powerpoint/2010/main" val="2471348453"/>
+        <p14:creationId xmlns:p14="http://schemas.microsoft.com/office/powerpoint/2010/main" val="636434661"/>
       </p:ext>
     </p:extLst>
   </p:cSld>
@@ -5367,10 +5325,10 @@
   </p:clrMapOvr>
   <mc:AlternateContent xmlns:mc="http://schemas.openxmlformats.org/markup-compatibility/2006">
     <mc:Choice xmlns:p14="http://schemas.microsoft.com/office/powerpoint/2010/main" Requires="p14">
-      <p:transition spd="slow" p14:dur="2000" advTm="11000"/>
+      <p:transition spd="slow" p14:dur="2000" advTm="6000"/>
     </mc:Choice>
     <mc:Fallback>
-      <p:transition spd="slow" advTm="11000"/>
+      <p:transition spd="slow" advTm="6000"/>
     </mc:Fallback>
   </mc:AlternateContent>
   <p:timing>
@@ -5401,7 +5359,7 @@
                                   <p:childTnLst>
                                     <p:cmd type="call" cmd="playFrom(0.0)">
                                       <p:cBhvr>
-                                        <p:cTn id="6" dur="10989" fill="hold"/>
+                                        <p:cTn id="6" dur="5687" fill="hold"/>
                                         <p:tgtEl>
                                           <p:spTgt spid="6"/>
                                         </p:tgtEl>
@@ -5482,7 +5440,7 @@
           <p:cNvPr id="2" name="テキスト ボックス 1">
             <a:extLst>
               <a:ext uri="{FF2B5EF4-FFF2-40B4-BE49-F238E27FC236}">
-                <a16:creationId xmlns:a16="http://schemas.microsoft.com/office/drawing/2014/main" id="{389971D4-5E6F-55DC-E172-4755EC6220E2}"/>
+                <a16:creationId xmlns:a16="http://schemas.microsoft.com/office/drawing/2014/main" id="{78F766A3-A4F2-0C38-E0DC-865314B2F878}"/>
               </a:ext>
             </a:extLst>
           </p:cNvPr>
@@ -5528,7 +5486,7 @@
           <p:cNvPr id="3" name="テキスト ボックス 2">
             <a:extLst>
               <a:ext uri="{FF2B5EF4-FFF2-40B4-BE49-F238E27FC236}">
-                <a16:creationId xmlns:a16="http://schemas.microsoft.com/office/drawing/2014/main" id="{A221670D-891C-68CE-779C-01F7A2881134}"/>
+                <a16:creationId xmlns:a16="http://schemas.microsoft.com/office/drawing/2014/main" id="{37194D66-67F2-D57B-157F-50575E028BE9}"/>
               </a:ext>
             </a:extLst>
           </p:cNvPr>
@@ -5568,7 +5526,7 @@
           <p:cNvPr id="4" name="テキスト ボックス 3">
             <a:extLst>
               <a:ext uri="{FF2B5EF4-FFF2-40B4-BE49-F238E27FC236}">
-                <a16:creationId xmlns:a16="http://schemas.microsoft.com/office/drawing/2014/main" id="{60A4CA1B-69D8-83E9-2464-947153D9768F}"/>
+                <a16:creationId xmlns:a16="http://schemas.microsoft.com/office/drawing/2014/main" id="{7C7FF6F4-DAAC-27EB-255C-6033B63D4F9E}"/>
               </a:ext>
             </a:extLst>
           </p:cNvPr>
@@ -5633,7 +5591,7 @@
           <p:cNvPr id="5" name="テキスト ボックス 4">
             <a:extLst>
               <a:ext uri="{FF2B5EF4-FFF2-40B4-BE49-F238E27FC236}">
-                <a16:creationId xmlns:a16="http://schemas.microsoft.com/office/drawing/2014/main" id="{939267DC-8EFA-42CA-939B-9640BED1D09B}"/>
+                <a16:creationId xmlns:a16="http://schemas.microsoft.com/office/drawing/2014/main" id="{A027F1E9-03F9-43DD-2BA9-9CB9BFA87CDE}"/>
               </a:ext>
             </a:extLst>
           </p:cNvPr>
@@ -5680,7 +5638,7 @@
             <a:hlinkClick r:id="" action="ppaction://media"/>
             <a:extLst>
               <a:ext uri="{FF2B5EF4-FFF2-40B4-BE49-F238E27FC236}">
-                <a16:creationId xmlns:a16="http://schemas.microsoft.com/office/drawing/2014/main" id="{E32510FB-CA70-EF28-AF32-E9024B7879D8}"/>
+                <a16:creationId xmlns:a16="http://schemas.microsoft.com/office/drawing/2014/main" id="{F324C99D-2E9D-9E3F-6E48-F6AE9F46E1E3}"/>
               </a:ext>
             </a:extLst>
           </p:cNvPr>
@@ -5715,7 +5673,7 @@
     </p:spTree>
     <p:extLst>
       <p:ext uri="{BB962C8B-B14F-4D97-AF65-F5344CB8AC3E}">
-        <p14:creationId xmlns:p14="http://schemas.microsoft.com/office/powerpoint/2010/main" val="2290921751"/>
+        <p14:creationId xmlns:p14="http://schemas.microsoft.com/office/powerpoint/2010/main" val="471533727"/>
       </p:ext>
     </p:extLst>
   </p:cSld>
